--- a/artifacts/speaking-portfolio-expanded/talks/product-engineering/product-engineering-40min-screen.pptx
+++ b/artifacts/speaking-portfolio-expanded/talks/product-engineering/product-engineering-40min-screen.pptx
@@ -1347,7 +1347,7 @@
                 <a:ea typeface="Arial"/>
                 <a:cs typeface="Arial"/>
               </a:rPr>
-              <a:t xml:space="preserve">Stage direction: Four and a half minutes in the 40/30 routes, 3:30 in the 15. Begin with only this slide, never the answer-labelled kit. After the vote open the kit and map B to Pressure copy, C to Clearer first step. Follow economics-product/demo.md. Allow 45 seconds to write the rule.</a:t>
+              <a:t xml:space="preserve">Stage direction: Four and a half minutes in the 40/30 routes, 3:30 in the 15. Begin with only this slide, never the answer-labelled kit. After the vote open the kit and map B to Pressure copy, C to Clearer first step. Follow demo.md. Allow 45 seconds to write the rule.</a:t>
             </a:r>
             <a:endParaRPr lang="en-US" sz="1200"/>
           </a:p>
@@ -2376,7 +2376,7 @@
                 <a:ea typeface="Arial"/>
                 <a:cs typeface="Arial"/>
               </a:rPr>
-              <a:t xml:space="preserve">![Prediction: tokens stop being a build cost and become a running cost. A shipped product with no new features still burns tokens to stay current and to defend itself, and somebody owns that meter.](../../reveal-talks/assets/product-engineering/fuel.svg)</a:t>
+              <a:t xml:space="preserve">![Prediction: tokens stop being a build cost and become a running cost. A shipped product with no new features still burns tokens to stay current and to defend itself, and somebody owns that meter.](../../../../public/talks/assets/product-engineering/fuel.svg)</a:t>
             </a:r>
             <a:endParaRPr lang="en-US" sz="1200"/>
           </a:p>
@@ -2949,7 +2949,7 @@
                 <a:ea typeface="Arial"/>
                 <a:cs typeface="Arial"/>
               </a:rPr>
-              <a:t xml:space="preserve">![Prediction: a grid of chosen apps gives way to one generated surface, adapting per person, with a revived terminal beside it. Who owns that channel is still open, and non-frontier builders can rethink any app as AI-native.](../../reveal-talks/assets/product-engineering/channel.svg)</a:t>
+              <a:t xml:space="preserve">![Prediction: a grid of chosen apps gives way to one generated surface, adapting per person, with a revived terminal beside it. Who owns that channel is still open, and non-frontier builders can rethink any app as AI-native.](../../../../public/talks/assets/product-engineering/channel.svg)</a:t>
             </a:r>
             <a:endParaRPr lang="en-US" sz="1200"/>
           </a:p>
@@ -5605,7 +5605,7 @@
                 <a:ea typeface="Arial"/>
                 <a:cs typeface="Arial"/>
               </a:rPr>
-              <a:t xml:space="preserve">![Draw the wires between agents](../../reveal-talks/assets/product-engineering/interfaces.svg)</a:t>
+              <a:t xml:space="preserve">![Draw the wires between agents](../../../../public/talks/assets/product-engineering/interfaces.svg)</a:t>
             </a:r>
             <a:endParaRPr lang="en-US" sz="1200"/>
           </a:p>
